--- a/agent-observability-course/10-graphics/slides/section-06.pptx
+++ b/agent-observability-course/10-graphics/slides/section-06.pptx
@@ -19220,7 +19220,7 @@
         </p:nvGraphicFramePr>
         <p:xfrm>
           <a:off x="457200" y="1667021"/>
-          <a:ext cx="11292838" cy="3072384"/>
+          <a:ext cx="11292840" cy="1316736"/>
         </p:xfrm>
         <a:graphic>
           <a:graphicData uri="http://schemas.openxmlformats.org/drawingml/2006/table">
@@ -19229,36 +19229,24 @@
                 <a:tableStyleId>{5C22544A-7EE6-4342-B048-85BDC9FD1C3A}</a:tableStyleId>
               </a:tblPr>
               <a:tblGrid>
-                <a:gridCol w="6053893"/>
-                <a:gridCol w="3143367"/>
-                <a:gridCol w="2095578"/>
+                <a:gridCol w="5733288"/>
+                <a:gridCol w="2432304"/>
+                <a:gridCol w="3127248"/>
               </a:tblGrid>
-              <a:tr h="384048">
-                <a:tc>
-                  <a:txBody>
-                    <a:bodyPr wrap="square"/>
-                    <a:lstStyle/>
-                    <a:p/>
-                  </a:txBody>
-                  <a:tcPr marL="91440" marR="91440" marT="45720" marB="45720" anchor="ctr">
-                    <a:solidFill>
-                      <a:srgbClr val="00D4AA"/>
-                    </a:solidFill>
-                  </a:tcPr>
-                </a:tc>
+              <a:tr h="438912">
                 <a:tc>
                   <a:txBody>
                     <a:bodyPr wrap="square"/>
                     <a:lstStyle/>
                     <a:p>
                       <a:r>
-                        <a:rPr sz="1200" b="1">
+                        <a:rPr sz="1400" b="1">
                           <a:solidFill>
                             <a:srgbClr val="0A1628"/>
                           </a:solidFill>
                           <a:latin typeface="Inter"/>
                         </a:rPr>
-                        <a:t>Before (everything on mini)</a:t>
+                        <a:t>Requests answered on gpt-4.1-mini</a:t>
                       </a:r>
                     </a:p>
                   </a:txBody>
@@ -19274,31 +19262,35 @@
                     <a:lstStyle/>
                     <a:p>
                       <a:r>
-                        <a:rPr sz="1200" b="1">
+                        <a:rPr sz="1400" b="1">
                           <a:solidFill>
                             <a:srgbClr val="0A1628"/>
                           </a:solidFill>
                           <a:latin typeface="Inter"/>
                         </a:rPr>
-                        <a:t>After (</a:t>
+                        <a:t>10,141, $55.90</a:t>
                       </a:r>
+                    </a:p>
+                  </a:txBody>
+                  <a:tcPr marL="91440" marR="91440" marT="45720" marB="45720" anchor="ctr">
+                    <a:solidFill>
+                      <a:srgbClr val="00D4AA"/>
+                    </a:solidFill>
+                  </a:tcPr>
+                </a:tc>
+                <a:tc>
+                  <a:txBody>
+                    <a:bodyPr wrap="square"/>
+                    <a:lstStyle/>
+                    <a:p>
                       <a:r>
-                        <a:rPr sz="1104" b="0">
-                          <a:solidFill>
-                            <a:srgbClr val="0A1628"/>
-                          </a:solidFill>
-                          <a:latin typeface="JetBrains Mono"/>
-                        </a:rPr>
-                        <a:t>ROUTER=1</a:t>
-                      </a:r>
-                      <a:r>
-                        <a:rPr sz="1200" b="1">
+                        <a:rPr sz="1400" b="1">
                           <a:solidFill>
                             <a:srgbClr val="0A1628"/>
                           </a:solidFill>
                           <a:latin typeface="Inter"/>
                         </a:rPr>
-                        <a:t>)</a:t>
+                        <a:t>6,744, $43.70</a:t>
                       </a:r>
                     </a:p>
                   </a:txBody>
@@ -19309,20 +19301,20 @@
                   </a:tcPr>
                 </a:tc>
               </a:tr>
-              <a:tr h="384048">
+              <a:tr h="438912">
                 <a:tc>
                   <a:txBody>
                     <a:bodyPr wrap="square"/>
                     <a:lstStyle/>
                     <a:p>
                       <a:r>
-                        <a:rPr sz="1200" b="1">
+                        <a:rPr sz="1400" b="1">
                           <a:solidFill>
                             <a:srgbClr val="FFFFFF"/>
                           </a:solidFill>
                           <a:latin typeface="Inter"/>
                         </a:rPr>
-                        <a:t>gpt-4.1-nano generations</a:t>
+                        <a:t>Day</a:t>
                       </a:r>
                     </a:p>
                   </a:txBody>
@@ -19338,13 +19330,13 @@
                     <a:lstStyle/>
                     <a:p>
                       <a:r>
-                        <a:rPr sz="1200" b="0">
+                        <a:rPr sz="1400" b="0">
                           <a:solidFill>
                             <a:srgbClr val="FFFFFF"/>
                           </a:solidFill>
                           <a:latin typeface="Inter"/>
                         </a:rPr>
-                        <a:t>0</a:t>
+                        <a:t>$56.28</a:t>
                       </a:r>
                     </a:p>
                   </a:txBody>
@@ -19360,13 +19352,13 @@
                     <a:lstStyle/>
                     <a:p>
                       <a:r>
-                        <a:rPr sz="1200" b="0">
+                        <a:rPr sz="1400" b="0">
                           <a:solidFill>
                             <a:srgbClr val="FFFFFF"/>
                           </a:solidFill>
                           <a:latin typeface="Inter"/>
                         </a:rPr>
-                        <a:t>6,700 (33%)</a:t>
+                        <a:t>$47.07</a:t>
                       </a:r>
                     </a:p>
                   </a:txBody>
@@ -19377,20 +19369,20 @@
                   </a:tcPr>
                 </a:tc>
               </a:tr>
-              <a:tr h="384048">
+              <a:tr h="438912">
                 <a:tc>
                   <a:txBody>
                     <a:bodyPr wrap="square"/>
                     <a:lstStyle/>
                     <a:p>
                       <a:r>
-                        <a:rPr sz="1200" b="1">
+                        <a:rPr sz="1400" b="1">
                           <a:solidFill>
                             <a:srgbClr val="FFFFFF"/>
                           </a:solidFill>
                           <a:latin typeface="Inter"/>
                         </a:rPr>
-                        <a:t>gpt-4.1-mini generations</a:t>
+                        <a:t>Saving</a:t>
                       </a:r>
                     </a:p>
                   </a:txBody>
@@ -19404,17 +19396,7 @@
                   <a:txBody>
                     <a:bodyPr wrap="square"/>
                     <a:lstStyle/>
-                    <a:p>
-                      <a:r>
-                        <a:rPr sz="1200" b="0">
-                          <a:solidFill>
-                            <a:srgbClr val="FFFFFF"/>
-                          </a:solidFill>
-                          <a:latin typeface="Inter"/>
-                        </a:rPr>
-                        <a:t>20,087</a:t>
-                      </a:r>
-                    </a:p>
+                    <a:p/>
                   </a:txBody>
                   <a:tcPr marL="91440" marR="91440" marT="45720" marB="45720" anchor="ctr">
                     <a:solidFill>
@@ -19428,337 +19410,7 @@
                     <a:lstStyle/>
                     <a:p>
                       <a:r>
-                        <a:rPr sz="1200" b="0">
-                          <a:solidFill>
-                            <a:srgbClr val="FFFFFF"/>
-                          </a:solidFill>
-                          <a:latin typeface="Inter"/>
-                        </a:rPr>
-                        <a:t>13,344</a:t>
-                      </a:r>
-                    </a:p>
-                  </a:txBody>
-                  <a:tcPr marL="91440" marR="91440" marT="45720" marB="45720" anchor="ctr">
-                    <a:solidFill>
-                      <a:srgbClr val="0F1E35"/>
-                    </a:solidFill>
-                  </a:tcPr>
-                </a:tc>
-              </a:tr>
-              <a:tr h="384048">
-                <a:tc>
-                  <a:txBody>
-                    <a:bodyPr wrap="square"/>
-                    <a:lstStyle/>
-                    <a:p>
-                      <a:r>
-                        <a:rPr sz="1200" b="1">
-                          <a:solidFill>
-                            <a:srgbClr val="FFFFFF"/>
-                          </a:solidFill>
-                          <a:latin typeface="Inter"/>
-                        </a:rPr>
-                        <a:t>gpt-4.1 generations (escalation)</a:t>
-                      </a:r>
-                    </a:p>
-                  </a:txBody>
-                  <a:tcPr marL="91440" marR="91440" marT="45720" marB="45720" anchor="ctr">
-                    <a:solidFill>
-                      <a:srgbClr val="1A2742"/>
-                    </a:solidFill>
-                  </a:tcPr>
-                </a:tc>
-                <a:tc>
-                  <a:txBody>
-                    <a:bodyPr wrap="square"/>
-                    <a:lstStyle/>
-                    <a:p>
-                      <a:r>
-                        <a:rPr sz="1200" b="0">
-                          <a:solidFill>
-                            <a:srgbClr val="FFFFFF"/>
-                          </a:solidFill>
-                          <a:latin typeface="Inter"/>
-                        </a:rPr>
-                        <a:t>43</a:t>
-                      </a:r>
-                    </a:p>
-                  </a:txBody>
-                  <a:tcPr marL="91440" marR="91440" marT="45720" marB="45720" anchor="ctr">
-                    <a:solidFill>
-                      <a:srgbClr val="1A2742"/>
-                    </a:solidFill>
-                  </a:tcPr>
-                </a:tc>
-                <a:tc>
-                  <a:txBody>
-                    <a:bodyPr wrap="square"/>
-                    <a:lstStyle/>
-                    <a:p>
-                      <a:r>
-                        <a:rPr sz="1200" b="0">
-                          <a:solidFill>
-                            <a:srgbClr val="FFFFFF"/>
-                          </a:solidFill>
-                          <a:latin typeface="Inter"/>
-                        </a:rPr>
-                        <a:t>43</a:t>
-                      </a:r>
-                    </a:p>
-                  </a:txBody>
-                  <a:tcPr marL="91440" marR="91440" marT="45720" marB="45720" anchor="ctr">
-                    <a:solidFill>
-                      <a:srgbClr val="1A2742"/>
-                    </a:solidFill>
-                  </a:tcPr>
-                </a:tc>
-              </a:tr>
-              <a:tr h="384048">
-                <a:tc>
-                  <a:txBody>
-                    <a:bodyPr wrap="square"/>
-                    <a:lstStyle/>
-                    <a:p>
-                      <a:r>
-                        <a:rPr sz="1200" b="1">
-                          <a:solidFill>
-                            <a:srgbClr val="FFFFFF"/>
-                          </a:solidFill>
-                          <a:latin typeface="Inter"/>
-                        </a:rPr>
-                        <a:t>Requests answered on gpt-4.1-nano (report, by model)</a:t>
-                      </a:r>
-                    </a:p>
-                  </a:txBody>
-                  <a:tcPr marL="91440" marR="91440" marT="45720" marB="45720" anchor="ctr">
-                    <a:solidFill>
-                      <a:srgbClr val="0F1E35"/>
-                    </a:solidFill>
-                  </a:tcPr>
-                </a:tc>
-                <a:tc>
-                  <a:txBody>
-                    <a:bodyPr wrap="square"/>
-                    <a:lstStyle/>
-                    <a:p>
-                      <a:r>
-                        <a:rPr sz="1200" b="0">
-                          <a:solidFill>
-                            <a:srgbClr val="FFFFFF"/>
-                          </a:solidFill>
-                          <a:latin typeface="Inter"/>
-                        </a:rPr>
-                        <a:t>0</a:t>
-                      </a:r>
-                    </a:p>
-                  </a:txBody>
-                  <a:tcPr marL="91440" marR="91440" marT="45720" marB="45720" anchor="ctr">
-                    <a:solidFill>
-                      <a:srgbClr val="0F1E35"/>
-                    </a:solidFill>
-                  </a:tcPr>
-                </a:tc>
-                <a:tc>
-                  <a:txBody>
-                    <a:bodyPr wrap="square"/>
-                    <a:lstStyle/>
-                    <a:p>
-                      <a:r>
-                        <a:rPr sz="1200" b="0">
-                          <a:solidFill>
-                            <a:srgbClr val="FFFFFF"/>
-                          </a:solidFill>
-                          <a:latin typeface="Inter"/>
-                        </a:rPr>
-                        <a:t>3,397, $3.05</a:t>
-                      </a:r>
-                    </a:p>
-                  </a:txBody>
-                  <a:tcPr marL="91440" marR="91440" marT="45720" marB="45720" anchor="ctr">
-                    <a:solidFill>
-                      <a:srgbClr val="0F1E35"/>
-                    </a:solidFill>
-                  </a:tcPr>
-                </a:tc>
-              </a:tr>
-              <a:tr h="384048">
-                <a:tc>
-                  <a:txBody>
-                    <a:bodyPr wrap="square"/>
-                    <a:lstStyle/>
-                    <a:p>
-                      <a:r>
-                        <a:rPr sz="1200" b="1">
-                          <a:solidFill>
-                            <a:srgbClr val="FFFFFF"/>
-                          </a:solidFill>
-                          <a:latin typeface="Inter"/>
-                        </a:rPr>
-                        <a:t>Requests answered on gpt-4.1-mini</a:t>
-                      </a:r>
-                    </a:p>
-                  </a:txBody>
-                  <a:tcPr marL="91440" marR="91440" marT="45720" marB="45720" anchor="ctr">
-                    <a:solidFill>
-                      <a:srgbClr val="1A2742"/>
-                    </a:solidFill>
-                  </a:tcPr>
-                </a:tc>
-                <a:tc>
-                  <a:txBody>
-                    <a:bodyPr wrap="square"/>
-                    <a:lstStyle/>
-                    <a:p>
-                      <a:r>
-                        <a:rPr sz="1200" b="0">
-                          <a:solidFill>
-                            <a:srgbClr val="FFFFFF"/>
-                          </a:solidFill>
-                          <a:latin typeface="Inter"/>
-                        </a:rPr>
-                        <a:t>10,141, $55.90</a:t>
-                      </a:r>
-                    </a:p>
-                  </a:txBody>
-                  <a:tcPr marL="91440" marR="91440" marT="45720" marB="45720" anchor="ctr">
-                    <a:solidFill>
-                      <a:srgbClr val="1A2742"/>
-                    </a:solidFill>
-                  </a:tcPr>
-                </a:tc>
-                <a:tc>
-                  <a:txBody>
-                    <a:bodyPr wrap="square"/>
-                    <a:lstStyle/>
-                    <a:p>
-                      <a:r>
-                        <a:rPr sz="1200" b="0">
-                          <a:solidFill>
-                            <a:srgbClr val="FFFFFF"/>
-                          </a:solidFill>
-                          <a:latin typeface="Inter"/>
-                        </a:rPr>
-                        <a:t>6,744, $43.70</a:t>
-                      </a:r>
-                    </a:p>
-                  </a:txBody>
-                  <a:tcPr marL="91440" marR="91440" marT="45720" marB="45720" anchor="ctr">
-                    <a:solidFill>
-                      <a:srgbClr val="1A2742"/>
-                    </a:solidFill>
-                  </a:tcPr>
-                </a:tc>
-              </a:tr>
-              <a:tr h="384048">
-                <a:tc>
-                  <a:txBody>
-                    <a:bodyPr wrap="square"/>
-                    <a:lstStyle/>
-                    <a:p>
-                      <a:r>
-                        <a:rPr sz="1200" b="1">
-                          <a:solidFill>
-                            <a:srgbClr val="FFFFFF"/>
-                          </a:solidFill>
-                          <a:latin typeface="Inter"/>
-                        </a:rPr>
-                        <a:t>Day</a:t>
-                      </a:r>
-                    </a:p>
-                  </a:txBody>
-                  <a:tcPr marL="91440" marR="91440" marT="45720" marB="45720" anchor="ctr">
-                    <a:solidFill>
-                      <a:srgbClr val="0F1E35"/>
-                    </a:solidFill>
-                  </a:tcPr>
-                </a:tc>
-                <a:tc>
-                  <a:txBody>
-                    <a:bodyPr wrap="square"/>
-                    <a:lstStyle/>
-                    <a:p>
-                      <a:r>
-                        <a:rPr sz="1200" b="0">
-                          <a:solidFill>
-                            <a:srgbClr val="FFFFFF"/>
-                          </a:solidFill>
-                          <a:latin typeface="Inter"/>
-                        </a:rPr>
-                        <a:t>$56.28</a:t>
-                      </a:r>
-                    </a:p>
-                  </a:txBody>
-                  <a:tcPr marL="91440" marR="91440" marT="45720" marB="45720" anchor="ctr">
-                    <a:solidFill>
-                      <a:srgbClr val="0F1E35"/>
-                    </a:solidFill>
-                  </a:tcPr>
-                </a:tc>
-                <a:tc>
-                  <a:txBody>
-                    <a:bodyPr wrap="square"/>
-                    <a:lstStyle/>
-                    <a:p>
-                      <a:r>
-                        <a:rPr sz="1200" b="0">
-                          <a:solidFill>
-                            <a:srgbClr val="FFFFFF"/>
-                          </a:solidFill>
-                          <a:latin typeface="Inter"/>
-                        </a:rPr>
-                        <a:t>$47.07</a:t>
-                      </a:r>
-                    </a:p>
-                  </a:txBody>
-                  <a:tcPr marL="91440" marR="91440" marT="45720" marB="45720" anchor="ctr">
-                    <a:solidFill>
-                      <a:srgbClr val="0F1E35"/>
-                    </a:solidFill>
-                  </a:tcPr>
-                </a:tc>
-              </a:tr>
-              <a:tr h="384048">
-                <a:tc>
-                  <a:txBody>
-                    <a:bodyPr wrap="square"/>
-                    <a:lstStyle/>
-                    <a:p>
-                      <a:r>
-                        <a:rPr sz="1200" b="1">
-                          <a:solidFill>
-                            <a:srgbClr val="FFFFFF"/>
-                          </a:solidFill>
-                          <a:latin typeface="Inter"/>
-                        </a:rPr>
-                        <a:t>Saving</a:t>
-                      </a:r>
-                    </a:p>
-                  </a:txBody>
-                  <a:tcPr marL="91440" marR="91440" marT="45720" marB="45720" anchor="ctr">
-                    <a:solidFill>
-                      <a:srgbClr val="1A2742"/>
-                    </a:solidFill>
-                  </a:tcPr>
-                </a:tc>
-                <a:tc>
-                  <a:txBody>
-                    <a:bodyPr wrap="square"/>
-                    <a:lstStyle/>
-                    <a:p/>
-                  </a:txBody>
-                  <a:tcPr marL="91440" marR="91440" marT="45720" marB="45720" anchor="ctr">
-                    <a:solidFill>
-                      <a:srgbClr val="1A2742"/>
-                    </a:solidFill>
-                  </a:tcPr>
-                </a:tc>
-                <a:tc>
-                  <a:txBody>
-                    <a:bodyPr wrap="square"/>
-                    <a:lstStyle/>
-                    <a:p>
-                      <a:r>
-                        <a:rPr sz="1200" b="0">
+                        <a:rPr sz="1400" b="0">
                           <a:solidFill>
                             <a:srgbClr val="FFFFFF"/>
                           </a:solidFill>
@@ -19770,7 +19422,7 @@
                   </a:txBody>
                   <a:tcPr marL="91440" marR="91440" marT="45720" marB="45720" anchor="ctr">
                     <a:solidFill>
-                      <a:srgbClr val="1A2742"/>
+                      <a:srgbClr val="0F1E35"/>
                     </a:solidFill>
                   </a:tcPr>
                 </a:tc>
